--- a/Manuscript/student_network_architecture_image/student.pptx
+++ b/Manuscript/student_network_architecture_image/student.pptx
@@ -1733,8 +1733,8 @@
         </p:nvSpPr>
         <p:spPr>
           <a:xfrm>
-            <a:off x="17478532" y="6068695"/>
-            <a:ext cx="3793490" cy="428625"/>
+            <a:off x="16588105" y="6097310"/>
+            <a:ext cx="4683760" cy="428625"/>
           </a:xfrm>
           <a:prstGeom prst="rect">
             <a:avLst/>
@@ -1764,7 +1764,27 @@
                 <a:latin typeface="Comic Sans MS" panose="030F0702030302020204" charset="0"/>
                 <a:cs typeface="Comic Sans MS" panose="030F0702030302020204" charset="0"/>
               </a:rPr>
-              <a:t>(c)Student Model based on LNN</a:t>
+              <a:t>(c)Student Model :</a:t>
+            </a:r>
+            <a:r>
+              <a:rPr lang="en-US" altLang="zh-CN" sz="1800" b="1">
+                <a:solidFill>
+                  <a:schemeClr val="tx1"/>
+                </a:solidFill>
+                <a:latin typeface="Comic Sans MS" panose="030F0702030302020204" charset="0"/>
+                <a:cs typeface="Comic Sans MS" panose="030F0702030302020204" charset="0"/>
+              </a:rPr>
+              <a:t>BiTAL </a:t>
+            </a:r>
+            <a:r>
+              <a:rPr lang="en-US" sz="1800" b="1">
+                <a:solidFill>
+                  <a:schemeClr val="tx1"/>
+                </a:solidFill>
+                <a:latin typeface="Comic Sans MS" panose="030F0702030302020204" charset="0"/>
+                <a:cs typeface="Comic Sans MS" panose="030F0702030302020204" charset="0"/>
+              </a:rPr>
+              <a:t>based on LNN</a:t>
             </a:r>
             <a:endParaRPr lang="en-US" sz="1800" b="1">
               <a:solidFill>
@@ -5114,1131 +5134,1106 @@
       </p:grpSp>
       <p:grpSp>
         <p:nvGrpSpPr>
-          <p:cNvPr id="193" name="组合 192"/>
+          <p:cNvPr id="38" name="组合 37"/>
           <p:cNvGrpSpPr/>
           <p:nvPr/>
         </p:nvGrpSpPr>
         <p:grpSpPr>
-          <a:xfrm>
-            <a:off x="9514217" y="1818005"/>
-            <a:ext cx="3722370" cy="925830"/>
-            <a:chOff x="11377" y="1416"/>
-            <a:chExt cx="5862" cy="1458"/>
+          <a:xfrm rot="0">
+            <a:off x="9514205" y="1945005"/>
+            <a:ext cx="1452880" cy="657225"/>
+            <a:chOff x="5360670" y="1085663"/>
+            <a:chExt cx="1453138" cy="1067258"/>
           </a:xfrm>
+          <a:scene3d>
+            <a:camera prst="isometricOffAxis2Right"/>
+            <a:lightRig rig="threePt" dir="t"/>
+          </a:scene3d>
         </p:grpSpPr>
-        <p:grpSp>
-          <p:nvGrpSpPr>
-            <p:cNvPr id="22" name="组合 21"/>
-            <p:cNvGrpSpPr/>
+        <p:sp>
+          <p:nvSpPr>
+            <p:cNvPr id="13" name="矩形 12"/>
+            <p:cNvSpPr/>
             <p:nvPr/>
-          </p:nvGrpSpPr>
-          <p:grpSpPr>
+          </p:nvSpPr>
+          <p:spPr>
             <a:xfrm>
-              <a:off x="11377" y="1616"/>
-              <a:ext cx="3462" cy="1078"/>
-              <a:chOff x="7610" y="1680"/>
-              <a:chExt cx="3462" cy="1750"/>
+              <a:off x="5360670" y="1085663"/>
+              <a:ext cx="1453138" cy="263394"/>
             </a:xfrm>
-          </p:grpSpPr>
-          <p:grpSp>
-            <p:nvGrpSpPr>
-              <p:cNvPr id="38" name="组合 37"/>
-              <p:cNvGrpSpPr/>
-              <p:nvPr/>
-            </p:nvGrpSpPr>
-            <p:grpSpPr>
-              <a:xfrm>
-                <a:off x="7610" y="1680"/>
-                <a:ext cx="2288" cy="1681"/>
-                <a:chOff x="5360670" y="1085663"/>
-                <a:chExt cx="1453138" cy="1067258"/>
-              </a:xfrm>
-              <a:scene3d>
-                <a:camera prst="isometricOffAxis2Right"/>
-                <a:lightRig rig="threePt" dir="t"/>
-              </a:scene3d>
-            </p:grpSpPr>
-            <p:sp>
-              <p:nvSpPr>
-                <p:cNvPr id="13" name="矩形 12"/>
-                <p:cNvSpPr/>
-                <p:nvPr/>
-              </p:nvSpPr>
-              <p:spPr>
-                <a:xfrm>
-                  <a:off x="5360670" y="1085663"/>
-                  <a:ext cx="1453138" cy="263394"/>
-                </a:xfrm>
-                <a:prstGeom prst="rect">
-                  <a:avLst/>
-                </a:prstGeom>
-                <a:noFill/>
-                <a:ln>
+            <a:prstGeom prst="rect">
+              <a:avLst/>
+            </a:prstGeom>
+            <a:noFill/>
+            <a:ln>
+              <a:solidFill>
+                <a:srgbClr val="34D399"/>
+              </a:solidFill>
+              <a:prstDash val="solid"/>
+            </a:ln>
+            <a:extLst>
+              <a:ext uri="{909E8E84-426E-40DD-AFC4-6F175D3DCCD1}">
+                <a14:hiddenFill xmlns:a14="http://schemas.microsoft.com/office/drawing/2010/main">
                   <a:solidFill>
-                    <a:srgbClr val="34D399"/>
+                    <a:schemeClr val="accent1"/>
                   </a:solidFill>
-                  <a:prstDash val="solid"/>
-                </a:ln>
-                <a:extLst>
-                  <a:ext uri="{909E8E84-426E-40DD-AFC4-6F175D3DCCD1}">
-                    <a14:hiddenFill xmlns:a14="http://schemas.microsoft.com/office/drawing/2010/main">
-                      <a:solidFill>
-                        <a:schemeClr val="accent1"/>
-                      </a:solidFill>
-                    </a14:hiddenFill>
-                  </a:ext>
-                </a:extLst>
-              </p:spPr>
-              <p:style>
-                <a:lnRef idx="2">
-                  <a:schemeClr val="accent1">
-                    <a:lumMod val="75000"/>
-                  </a:schemeClr>
-                </a:lnRef>
-                <a:fillRef idx="1">
-                  <a:schemeClr val="accent1"/>
-                </a:fillRef>
-                <a:effectRef idx="0">
-                  <a:srgbClr val="FFFFFF"/>
-                </a:effectRef>
-                <a:fontRef idx="minor">
-                  <a:schemeClr val="lt1"/>
-                </a:fontRef>
-              </p:style>
-              <p:txBody>
-                <a:bodyPr rtlCol="0" anchor="ctr"/>
-                <a:lstStyle/>
-                <a:p>
-                  <a:pPr algn="ctr"/>
-                  <a:endParaRPr lang="zh-CN" altLang="en-US"/>
-                </a:p>
-              </p:txBody>
-            </p:sp>
-            <p:sp>
-              <p:nvSpPr>
-                <p:cNvPr id="15" name="矩形 14"/>
-                <p:cNvSpPr/>
-                <p:nvPr/>
-              </p:nvSpPr>
-              <p:spPr>
-                <a:xfrm>
-                  <a:off x="5360670" y="1347825"/>
-                  <a:ext cx="1453138" cy="263394"/>
-                </a:xfrm>
-                <a:prstGeom prst="rect">
-                  <a:avLst/>
-                </a:prstGeom>
-                <a:noFill/>
-                <a:ln>
-                  <a:solidFill>
-                    <a:schemeClr val="accent6"/>
-                  </a:solidFill>
-                  <a:prstDash val="solid"/>
-                </a:ln>
-                <a:extLst>
-                  <a:ext uri="{909E8E84-426E-40DD-AFC4-6F175D3DCCD1}">
-                    <a14:hiddenFill xmlns:a14="http://schemas.microsoft.com/office/drawing/2010/main">
-                      <a:solidFill>
-                        <a:schemeClr val="accent1"/>
-                      </a:solidFill>
-                    </a14:hiddenFill>
-                  </a:ext>
-                </a:extLst>
-              </p:spPr>
-              <p:style>
-                <a:lnRef idx="2">
-                  <a:schemeClr val="accent1">
-                    <a:lumMod val="75000"/>
-                  </a:schemeClr>
-                </a:lnRef>
-                <a:fillRef idx="1">
-                  <a:schemeClr val="accent1"/>
-                </a:fillRef>
-                <a:effectRef idx="0">
-                  <a:srgbClr val="FFFFFF"/>
-                </a:effectRef>
-                <a:fontRef idx="minor">
-                  <a:schemeClr val="lt1"/>
-                </a:fontRef>
-              </p:style>
-              <p:txBody>
-                <a:bodyPr rtlCol="0" anchor="ctr"/>
-                <a:lstStyle/>
-                <a:p>
-                  <a:pPr algn="ctr"/>
-                  <a:endParaRPr lang="zh-CN" altLang="en-US"/>
-                </a:p>
-              </p:txBody>
-            </p:sp>
-            <p:sp>
-              <p:nvSpPr>
-                <p:cNvPr id="17" name="矩形 16"/>
-                <p:cNvSpPr/>
-                <p:nvPr/>
-              </p:nvSpPr>
-              <p:spPr>
-                <a:xfrm>
-                  <a:off x="5360670" y="1617569"/>
-                  <a:ext cx="1453138" cy="263394"/>
-                </a:xfrm>
-                <a:prstGeom prst="rect">
-                  <a:avLst/>
-                </a:prstGeom>
-                <a:noFill/>
-                <a:ln>
-                  <a:solidFill>
-                    <a:srgbClr val="34D399"/>
-                  </a:solidFill>
-                  <a:prstDash val="solid"/>
-                </a:ln>
-                <a:extLst>
-                  <a:ext uri="{909E8E84-426E-40DD-AFC4-6F175D3DCCD1}">
-                    <a14:hiddenFill xmlns:a14="http://schemas.microsoft.com/office/drawing/2010/main">
-                      <a:solidFill>
-                        <a:schemeClr val="accent1"/>
-                      </a:solidFill>
-                    </a14:hiddenFill>
-                  </a:ext>
-                </a:extLst>
-              </p:spPr>
-              <p:style>
-                <a:lnRef idx="2">
-                  <a:schemeClr val="accent1">
-                    <a:lumMod val="75000"/>
-                  </a:schemeClr>
-                </a:lnRef>
-                <a:fillRef idx="1">
-                  <a:schemeClr val="accent1"/>
-                </a:fillRef>
-                <a:effectRef idx="0">
-                  <a:srgbClr val="FFFFFF"/>
-                </a:effectRef>
-                <a:fontRef idx="minor">
-                  <a:schemeClr val="lt1"/>
-                </a:fontRef>
-              </p:style>
-              <p:txBody>
-                <a:bodyPr rtlCol="0" anchor="ctr"/>
-                <a:lstStyle/>
-                <a:p>
-                  <a:pPr algn="ctr"/>
-                  <a:endParaRPr lang="zh-CN" altLang="en-US"/>
-                </a:p>
-              </p:txBody>
-            </p:sp>
-            <p:sp>
-              <p:nvSpPr>
-                <p:cNvPr id="19" name="矩形 18"/>
-                <p:cNvSpPr/>
-                <p:nvPr/>
-              </p:nvSpPr>
-              <p:spPr>
-                <a:xfrm>
-                  <a:off x="5360670" y="1889527"/>
-                  <a:ext cx="1453138" cy="263394"/>
-                </a:xfrm>
-                <a:prstGeom prst="rect">
-                  <a:avLst/>
-                </a:prstGeom>
-                <a:noFill/>
-                <a:ln>
-                  <a:solidFill>
-                    <a:schemeClr val="accent6"/>
-                  </a:solidFill>
-                  <a:prstDash val="solid"/>
-                </a:ln>
-                <a:extLst>
-                  <a:ext uri="{909E8E84-426E-40DD-AFC4-6F175D3DCCD1}">
-                    <a14:hiddenFill xmlns:a14="http://schemas.microsoft.com/office/drawing/2010/main">
-                      <a:solidFill>
-                        <a:schemeClr val="accent1"/>
-                      </a:solidFill>
-                    </a14:hiddenFill>
-                  </a:ext>
-                </a:extLst>
-              </p:spPr>
-              <p:style>
-                <a:lnRef idx="2">
-                  <a:schemeClr val="accent1">
-                    <a:lumMod val="75000"/>
-                  </a:schemeClr>
-                </a:lnRef>
-                <a:fillRef idx="1">
-                  <a:schemeClr val="accent1"/>
-                </a:fillRef>
-                <a:effectRef idx="0">
-                  <a:srgbClr val="FFFFFF"/>
-                </a:effectRef>
-                <a:fontRef idx="minor">
-                  <a:schemeClr val="lt1"/>
-                </a:fontRef>
-              </p:style>
-              <p:txBody>
-                <a:bodyPr rtlCol="0" anchor="ctr"/>
-                <a:lstStyle/>
-                <a:p>
-                  <a:pPr algn="ctr"/>
-                  <a:endParaRPr lang="zh-CN" altLang="en-US"/>
-                </a:p>
-              </p:txBody>
-            </p:sp>
-          </p:grpSp>
-          <p:grpSp>
-            <p:nvGrpSpPr>
-              <p:cNvPr id="43" name="组合 42"/>
-              <p:cNvGrpSpPr/>
-              <p:nvPr/>
-            </p:nvGrpSpPr>
-            <p:grpSpPr>
-              <a:xfrm>
-                <a:off x="8784" y="1750"/>
-                <a:ext cx="2288" cy="1681"/>
-                <a:chOff x="5360670" y="1085663"/>
-                <a:chExt cx="1453138" cy="1067258"/>
-              </a:xfrm>
-              <a:scene3d>
-                <a:camera prst="isometricOffAxis2Right"/>
-                <a:lightRig rig="threePt" dir="t"/>
-              </a:scene3d>
-            </p:grpSpPr>
-            <p:sp>
-              <p:nvSpPr>
-                <p:cNvPr id="45" name="矩形 44"/>
-                <p:cNvSpPr/>
-                <p:nvPr/>
-              </p:nvSpPr>
-              <p:spPr>
-                <a:xfrm>
-                  <a:off x="5360670" y="1085663"/>
-                  <a:ext cx="1453138" cy="263394"/>
-                </a:xfrm>
-                <a:prstGeom prst="rect">
-                  <a:avLst/>
-                </a:prstGeom>
-                <a:noFill/>
-                <a:ln>
-                  <a:solidFill>
-                    <a:schemeClr val="accent4">
-                      <a:lumMod val="60000"/>
-                      <a:lumOff val="40000"/>
-                    </a:schemeClr>
-                  </a:solidFill>
-                  <a:prstDash val="solid"/>
-                </a:ln>
-                <a:extLst>
-                  <a:ext uri="{909E8E84-426E-40DD-AFC4-6F175D3DCCD1}">
-                    <a14:hiddenFill xmlns:a14="http://schemas.microsoft.com/office/drawing/2010/main">
-                      <a:solidFill>
-                        <a:schemeClr val="accent1"/>
-                      </a:solidFill>
-                    </a14:hiddenFill>
-                  </a:ext>
-                </a:extLst>
-              </p:spPr>
-              <p:style>
-                <a:lnRef idx="2">
-                  <a:schemeClr val="accent1">
-                    <a:lumMod val="75000"/>
-                  </a:schemeClr>
-                </a:lnRef>
-                <a:fillRef idx="1">
-                  <a:schemeClr val="accent1"/>
-                </a:fillRef>
-                <a:effectRef idx="0">
-                  <a:srgbClr val="FFFFFF"/>
-                </a:effectRef>
-                <a:fontRef idx="minor">
-                  <a:schemeClr val="lt1"/>
-                </a:fontRef>
-              </p:style>
-              <p:txBody>
-                <a:bodyPr rtlCol="0" anchor="ctr"/>
-                <a:lstStyle/>
-                <a:p>
-                  <a:pPr algn="ctr"/>
-                  <a:endParaRPr lang="zh-CN" altLang="en-US" dirty="0"/>
-                </a:p>
-              </p:txBody>
-            </p:sp>
-            <p:sp>
-              <p:nvSpPr>
-                <p:cNvPr id="47" name="矩形 46"/>
-                <p:cNvSpPr/>
-                <p:nvPr/>
-              </p:nvSpPr>
-              <p:spPr>
-                <a:xfrm>
-                  <a:off x="5360670" y="1347825"/>
-                  <a:ext cx="1453138" cy="263394"/>
-                </a:xfrm>
-                <a:prstGeom prst="rect">
-                  <a:avLst/>
-                </a:prstGeom>
-                <a:noFill/>
-                <a:ln>
-                  <a:solidFill>
-                    <a:schemeClr val="accent4">
-                      <a:lumMod val="50000"/>
-                    </a:schemeClr>
-                  </a:solidFill>
-                  <a:prstDash val="solid"/>
-                </a:ln>
-                <a:extLst>
-                  <a:ext uri="{909E8E84-426E-40DD-AFC4-6F175D3DCCD1}">
-                    <a14:hiddenFill xmlns:a14="http://schemas.microsoft.com/office/drawing/2010/main">
-                      <a:solidFill>
-                        <a:schemeClr val="accent1"/>
-                      </a:solidFill>
-                    </a14:hiddenFill>
-                  </a:ext>
-                </a:extLst>
-              </p:spPr>
-              <p:style>
-                <a:lnRef idx="2">
-                  <a:schemeClr val="accent1">
-                    <a:lumMod val="75000"/>
-                  </a:schemeClr>
-                </a:lnRef>
-                <a:fillRef idx="1">
-                  <a:schemeClr val="accent1"/>
-                </a:fillRef>
-                <a:effectRef idx="0">
-                  <a:srgbClr val="FFFFFF"/>
-                </a:effectRef>
-                <a:fontRef idx="minor">
-                  <a:schemeClr val="lt1"/>
-                </a:fontRef>
-              </p:style>
-              <p:txBody>
-                <a:bodyPr rtlCol="0" anchor="ctr"/>
-                <a:lstStyle/>
-                <a:p>
-                  <a:pPr algn="ctr"/>
-                  <a:endParaRPr lang="zh-CN" altLang="en-US"/>
-                </a:p>
-              </p:txBody>
-            </p:sp>
-            <p:sp>
-              <p:nvSpPr>
-                <p:cNvPr id="49" name="矩形 48"/>
-                <p:cNvSpPr/>
-                <p:nvPr/>
-              </p:nvSpPr>
-              <p:spPr>
-                <a:xfrm>
-                  <a:off x="5360670" y="1617569"/>
-                  <a:ext cx="1453138" cy="263394"/>
-                </a:xfrm>
-                <a:prstGeom prst="rect">
-                  <a:avLst/>
-                </a:prstGeom>
-                <a:noFill/>
-                <a:ln>
-                  <a:solidFill>
-                    <a:schemeClr val="accent4">
-                      <a:lumMod val="60000"/>
-                      <a:lumOff val="40000"/>
-                    </a:schemeClr>
-                  </a:solidFill>
-                  <a:prstDash val="solid"/>
-                </a:ln>
-                <a:extLst>
-                  <a:ext uri="{909E8E84-426E-40DD-AFC4-6F175D3DCCD1}">
-                    <a14:hiddenFill xmlns:a14="http://schemas.microsoft.com/office/drawing/2010/main">
-                      <a:solidFill>
-                        <a:schemeClr val="accent1"/>
-                      </a:solidFill>
-                    </a14:hiddenFill>
-                  </a:ext>
-                </a:extLst>
-              </p:spPr>
-              <p:style>
-                <a:lnRef idx="2">
-                  <a:schemeClr val="accent1">
-                    <a:lumMod val="75000"/>
-                  </a:schemeClr>
-                </a:lnRef>
-                <a:fillRef idx="1">
-                  <a:schemeClr val="accent1"/>
-                </a:fillRef>
-                <a:effectRef idx="0">
-                  <a:srgbClr val="FFFFFF"/>
-                </a:effectRef>
-                <a:fontRef idx="minor">
-                  <a:schemeClr val="lt1"/>
-                </a:fontRef>
-              </p:style>
-              <p:txBody>
-                <a:bodyPr rtlCol="0" anchor="ctr"/>
-                <a:lstStyle/>
-                <a:p>
-                  <a:pPr algn="ctr"/>
-                  <a:endParaRPr lang="zh-CN" altLang="en-US"/>
-                </a:p>
-              </p:txBody>
-            </p:sp>
-            <p:sp>
-              <p:nvSpPr>
-                <p:cNvPr id="50" name="矩形 49"/>
-                <p:cNvSpPr/>
-                <p:nvPr/>
-              </p:nvSpPr>
-              <p:spPr>
-                <a:xfrm>
-                  <a:off x="5360670" y="1889527"/>
-                  <a:ext cx="1453138" cy="263394"/>
-                </a:xfrm>
-                <a:prstGeom prst="rect">
-                  <a:avLst/>
-                </a:prstGeom>
-                <a:noFill/>
-                <a:ln>
-                  <a:solidFill>
-                    <a:schemeClr val="accent4">
-                      <a:lumMod val="50000"/>
-                    </a:schemeClr>
-                  </a:solidFill>
-                  <a:prstDash val="solid"/>
-                </a:ln>
-                <a:extLst>
-                  <a:ext uri="{909E8E84-426E-40DD-AFC4-6F175D3DCCD1}">
-                    <a14:hiddenFill xmlns:a14="http://schemas.microsoft.com/office/drawing/2010/main">
-                      <a:solidFill>
-                        <a:schemeClr val="accent1"/>
-                      </a:solidFill>
-                    </a14:hiddenFill>
-                  </a:ext>
-                </a:extLst>
-              </p:spPr>
-              <p:style>
-                <a:lnRef idx="2">
-                  <a:schemeClr val="accent1">
-                    <a:lumMod val="75000"/>
-                  </a:schemeClr>
-                </a:lnRef>
-                <a:fillRef idx="1">
-                  <a:schemeClr val="accent1"/>
-                </a:fillRef>
-                <a:effectRef idx="0">
-                  <a:srgbClr val="FFFFFF"/>
-                </a:effectRef>
-                <a:fontRef idx="minor">
-                  <a:schemeClr val="lt1"/>
-                </a:fontRef>
-              </p:style>
-              <p:txBody>
-                <a:bodyPr rtlCol="0" anchor="ctr"/>
-                <a:lstStyle/>
-                <a:p>
-                  <a:pPr algn="ctr"/>
-                  <a:endParaRPr lang="zh-CN" altLang="en-US" dirty="0"/>
-                </a:p>
-              </p:txBody>
-            </p:sp>
-          </p:grpSp>
-        </p:grpSp>
-        <p:grpSp>
-          <p:nvGrpSpPr>
-            <p:cNvPr id="24" name="组合 23"/>
-            <p:cNvGrpSpPr/>
-            <p:nvPr/>
-          </p:nvGrpSpPr>
-          <p:grpSpPr>
-            <a:xfrm>
-              <a:off x="13777" y="1797"/>
-              <a:ext cx="2288" cy="1035"/>
-              <a:chOff x="5360670" y="1085663"/>
-              <a:chExt cx="1453138" cy="1067258"/>
-            </a:xfrm>
-            <a:scene3d>
-              <a:camera prst="isometricOffAxis2Right"/>
-              <a:lightRig rig="threePt" dir="t"/>
-            </a:scene3d>
-          </p:grpSpPr>
-          <p:sp>
-            <p:nvSpPr>
-              <p:cNvPr id="25" name="矩形 24"/>
-              <p:cNvSpPr/>
-              <p:nvPr/>
-            </p:nvSpPr>
-            <p:spPr>
-              <a:xfrm>
-                <a:off x="5360670" y="1085663"/>
-                <a:ext cx="1453138" cy="263394"/>
-              </a:xfrm>
-              <a:prstGeom prst="rect">
-                <a:avLst/>
-              </a:prstGeom>
-              <a:noFill/>
-              <a:ln>
-                <a:solidFill>
-                  <a:srgbClr val="34D399"/>
-                </a:solidFill>
-                <a:prstDash val="solid"/>
-              </a:ln>
-              <a:extLst>
-                <a:ext uri="{909E8E84-426E-40DD-AFC4-6F175D3DCCD1}">
-                  <a14:hiddenFill xmlns:a14="http://schemas.microsoft.com/office/drawing/2010/main">
-                    <a:solidFill>
-                      <a:schemeClr val="accent1"/>
-                    </a:solidFill>
-                  </a14:hiddenFill>
-                </a:ext>
-              </a:extLst>
-            </p:spPr>
-            <p:style>
-              <a:lnRef idx="2">
-                <a:schemeClr val="accent1">
-                  <a:lumMod val="75000"/>
-                </a:schemeClr>
-              </a:lnRef>
-              <a:fillRef idx="1">
-                <a:schemeClr val="accent1"/>
-              </a:fillRef>
-              <a:effectRef idx="0">
-                <a:srgbClr val="FFFFFF"/>
-              </a:effectRef>
-              <a:fontRef idx="minor">
-                <a:schemeClr val="lt1"/>
-              </a:fontRef>
-            </p:style>
-            <p:txBody>
-              <a:bodyPr rtlCol="0" anchor="ctr"/>
-              <a:lstStyle/>
-              <a:p>
-                <a:pPr algn="ctr"/>
-                <a:endParaRPr lang="zh-CN" altLang="en-US"/>
-              </a:p>
-            </p:txBody>
-          </p:sp>
-          <p:sp>
-            <p:nvSpPr>
-              <p:cNvPr id="44" name="矩形 43"/>
-              <p:cNvSpPr/>
-              <p:nvPr/>
-            </p:nvSpPr>
-            <p:spPr>
-              <a:xfrm>
-                <a:off x="5360670" y="1347825"/>
-                <a:ext cx="1453138" cy="263394"/>
-              </a:xfrm>
-              <a:prstGeom prst="rect">
-                <a:avLst/>
-              </a:prstGeom>
-              <a:noFill/>
-              <a:ln>
-                <a:solidFill>
-                  <a:schemeClr val="accent6"/>
-                </a:solidFill>
-                <a:prstDash val="solid"/>
-              </a:ln>
-              <a:extLst>
-                <a:ext uri="{909E8E84-426E-40DD-AFC4-6F175D3DCCD1}">
-                  <a14:hiddenFill xmlns:a14="http://schemas.microsoft.com/office/drawing/2010/main">
-                    <a:solidFill>
-                      <a:schemeClr val="accent1"/>
-                    </a:solidFill>
-                  </a14:hiddenFill>
-                </a:ext>
-              </a:extLst>
-            </p:spPr>
-            <p:style>
-              <a:lnRef idx="2">
-                <a:schemeClr val="accent1">
-                  <a:lumMod val="75000"/>
-                </a:schemeClr>
-              </a:lnRef>
-              <a:fillRef idx="1">
-                <a:schemeClr val="accent1"/>
-              </a:fillRef>
-              <a:effectRef idx="0">
-                <a:srgbClr val="FFFFFF"/>
-              </a:effectRef>
-              <a:fontRef idx="minor">
-                <a:schemeClr val="lt1"/>
-              </a:fontRef>
-            </p:style>
-            <p:txBody>
-              <a:bodyPr rtlCol="0" anchor="ctr"/>
-              <a:lstStyle/>
-              <a:p>
-                <a:pPr algn="ctr"/>
-                <a:endParaRPr lang="zh-CN" altLang="en-US"/>
-              </a:p>
-            </p:txBody>
-          </p:sp>
-          <p:sp>
-            <p:nvSpPr>
-              <p:cNvPr id="46" name="矩形 45"/>
-              <p:cNvSpPr/>
-              <p:nvPr/>
-            </p:nvSpPr>
-            <p:spPr>
-              <a:xfrm>
-                <a:off x="5360670" y="1617569"/>
-                <a:ext cx="1453138" cy="263394"/>
-              </a:xfrm>
-              <a:prstGeom prst="rect">
-                <a:avLst/>
-              </a:prstGeom>
-              <a:noFill/>
-              <a:ln>
-                <a:solidFill>
-                  <a:srgbClr val="34D399"/>
-                </a:solidFill>
-                <a:prstDash val="solid"/>
-              </a:ln>
-              <a:extLst>
-                <a:ext uri="{909E8E84-426E-40DD-AFC4-6F175D3DCCD1}">
-                  <a14:hiddenFill xmlns:a14="http://schemas.microsoft.com/office/drawing/2010/main">
-                    <a:solidFill>
-                      <a:schemeClr val="accent1"/>
-                    </a:solidFill>
-                  </a14:hiddenFill>
-                </a:ext>
-              </a:extLst>
-            </p:spPr>
-            <p:style>
-              <a:lnRef idx="2">
-                <a:schemeClr val="accent1">
-                  <a:lumMod val="75000"/>
-                </a:schemeClr>
-              </a:lnRef>
-              <a:fillRef idx="1">
-                <a:schemeClr val="accent1"/>
-              </a:fillRef>
-              <a:effectRef idx="0">
-                <a:srgbClr val="FFFFFF"/>
-              </a:effectRef>
-              <a:fontRef idx="minor">
-                <a:schemeClr val="lt1"/>
-              </a:fontRef>
-            </p:style>
-            <p:txBody>
-              <a:bodyPr rtlCol="0" anchor="ctr"/>
-              <a:lstStyle/>
-              <a:p>
-                <a:pPr algn="ctr"/>
-                <a:endParaRPr lang="zh-CN" altLang="en-US"/>
-              </a:p>
-            </p:txBody>
-          </p:sp>
-          <p:sp>
-            <p:nvSpPr>
-              <p:cNvPr id="48" name="矩形 47"/>
-              <p:cNvSpPr/>
-              <p:nvPr/>
-            </p:nvSpPr>
-            <p:spPr>
-              <a:xfrm>
-                <a:off x="5360670" y="1889527"/>
-                <a:ext cx="1453138" cy="263394"/>
-              </a:xfrm>
-              <a:prstGeom prst="rect">
-                <a:avLst/>
-              </a:prstGeom>
-              <a:noFill/>
-              <a:ln>
-                <a:solidFill>
-                  <a:schemeClr val="accent6"/>
-                </a:solidFill>
-                <a:prstDash val="solid"/>
-              </a:ln>
-              <a:extLst>
-                <a:ext uri="{909E8E84-426E-40DD-AFC4-6F175D3DCCD1}">
-                  <a14:hiddenFill xmlns:a14="http://schemas.microsoft.com/office/drawing/2010/main">
-                    <a:solidFill>
-                      <a:schemeClr val="accent1"/>
-                    </a:solidFill>
-                  </a14:hiddenFill>
-                </a:ext>
-              </a:extLst>
-            </p:spPr>
-            <p:style>
-              <a:lnRef idx="2">
-                <a:schemeClr val="accent1">
-                  <a:lumMod val="75000"/>
-                </a:schemeClr>
-              </a:lnRef>
-              <a:fillRef idx="1">
-                <a:schemeClr val="accent1"/>
-              </a:fillRef>
-              <a:effectRef idx="0">
-                <a:srgbClr val="FFFFFF"/>
-              </a:effectRef>
-              <a:fontRef idx="minor">
-                <a:schemeClr val="lt1"/>
-              </a:fontRef>
-            </p:style>
-            <p:txBody>
-              <a:bodyPr rtlCol="0" anchor="ctr"/>
-              <a:lstStyle/>
-              <a:p>
-                <a:pPr algn="ctr"/>
-                <a:endParaRPr lang="zh-CN" altLang="en-US"/>
-              </a:p>
-            </p:txBody>
-          </p:sp>
-        </p:grpSp>
-        <p:grpSp>
-          <p:nvGrpSpPr>
-            <p:cNvPr id="51" name="组合 50"/>
-            <p:cNvGrpSpPr/>
-            <p:nvPr/>
-          </p:nvGrpSpPr>
-          <p:grpSpPr>
-            <a:xfrm>
-              <a:off x="14951" y="1840"/>
-              <a:ext cx="2288" cy="1035"/>
-              <a:chOff x="5360670" y="1085663"/>
-              <a:chExt cx="1453138" cy="1067258"/>
-            </a:xfrm>
-            <a:scene3d>
-              <a:camera prst="isometricOffAxis2Right"/>
-              <a:lightRig rig="threePt" dir="t"/>
-            </a:scene3d>
-          </p:grpSpPr>
-          <p:sp>
-            <p:nvSpPr>
-              <p:cNvPr id="52" name="矩形 51"/>
-              <p:cNvSpPr/>
-              <p:nvPr/>
-            </p:nvSpPr>
-            <p:spPr>
-              <a:xfrm>
-                <a:off x="5360670" y="1085663"/>
-                <a:ext cx="1453138" cy="263394"/>
-              </a:xfrm>
-              <a:prstGeom prst="rect">
-                <a:avLst/>
-              </a:prstGeom>
-              <a:noFill/>
-              <a:ln>
-                <a:solidFill>
-                  <a:schemeClr val="accent4">
-                    <a:lumMod val="60000"/>
-                    <a:lumOff val="40000"/>
-                  </a:schemeClr>
-                </a:solidFill>
-                <a:prstDash val="solid"/>
-              </a:ln>
-              <a:extLst>
-                <a:ext uri="{909E8E84-426E-40DD-AFC4-6F175D3DCCD1}">
-                  <a14:hiddenFill xmlns:a14="http://schemas.microsoft.com/office/drawing/2010/main">
-                    <a:solidFill>
-                      <a:schemeClr val="accent1"/>
-                    </a:solidFill>
-                  </a14:hiddenFill>
-                </a:ext>
-              </a:extLst>
-            </p:spPr>
-            <p:style>
-              <a:lnRef idx="2">
-                <a:schemeClr val="accent1">
-                  <a:lumMod val="75000"/>
-                </a:schemeClr>
-              </a:lnRef>
-              <a:fillRef idx="1">
-                <a:schemeClr val="accent1"/>
-              </a:fillRef>
-              <a:effectRef idx="0">
-                <a:srgbClr val="FFFFFF"/>
-              </a:effectRef>
-              <a:fontRef idx="minor">
-                <a:schemeClr val="lt1"/>
-              </a:fontRef>
-            </p:style>
-            <p:txBody>
-              <a:bodyPr rtlCol="0" anchor="ctr"/>
-              <a:lstStyle/>
-              <a:p>
-                <a:pPr algn="ctr"/>
-                <a:endParaRPr lang="zh-CN" altLang="en-US" dirty="0"/>
-              </a:p>
-            </p:txBody>
-          </p:sp>
-          <p:sp>
-            <p:nvSpPr>
-              <p:cNvPr id="53" name="矩形 52"/>
-              <p:cNvSpPr/>
-              <p:nvPr/>
-            </p:nvSpPr>
-            <p:spPr>
-              <a:xfrm>
-                <a:off x="5360670" y="1347825"/>
-                <a:ext cx="1453138" cy="263394"/>
-              </a:xfrm>
-              <a:prstGeom prst="rect">
-                <a:avLst/>
-              </a:prstGeom>
-              <a:noFill/>
-              <a:ln>
-                <a:solidFill>
-                  <a:schemeClr val="accent4">
-                    <a:lumMod val="50000"/>
-                  </a:schemeClr>
-                </a:solidFill>
-                <a:prstDash val="solid"/>
-              </a:ln>
-              <a:extLst>
-                <a:ext uri="{909E8E84-426E-40DD-AFC4-6F175D3DCCD1}">
-                  <a14:hiddenFill xmlns:a14="http://schemas.microsoft.com/office/drawing/2010/main">
-                    <a:solidFill>
-                      <a:schemeClr val="accent1"/>
-                    </a:solidFill>
-                  </a14:hiddenFill>
-                </a:ext>
-              </a:extLst>
-            </p:spPr>
-            <p:style>
-              <a:lnRef idx="2">
-                <a:schemeClr val="accent1">
-                  <a:lumMod val="75000"/>
-                </a:schemeClr>
-              </a:lnRef>
-              <a:fillRef idx="1">
-                <a:schemeClr val="accent1"/>
-              </a:fillRef>
-              <a:effectRef idx="0">
-                <a:srgbClr val="FFFFFF"/>
-              </a:effectRef>
-              <a:fontRef idx="minor">
-                <a:schemeClr val="lt1"/>
-              </a:fontRef>
-            </p:style>
-            <p:txBody>
-              <a:bodyPr rtlCol="0" anchor="ctr"/>
-              <a:lstStyle/>
-              <a:p>
-                <a:pPr algn="ctr"/>
-                <a:endParaRPr lang="zh-CN" altLang="en-US"/>
-              </a:p>
-            </p:txBody>
-          </p:sp>
-          <p:sp>
-            <p:nvSpPr>
-              <p:cNvPr id="54" name="矩形 53"/>
-              <p:cNvSpPr/>
-              <p:nvPr/>
-            </p:nvSpPr>
-            <p:spPr>
-              <a:xfrm>
-                <a:off x="5360670" y="1617569"/>
-                <a:ext cx="1453138" cy="263394"/>
-              </a:xfrm>
-              <a:prstGeom prst="rect">
-                <a:avLst/>
-              </a:prstGeom>
-              <a:noFill/>
-              <a:ln>
-                <a:solidFill>
-                  <a:schemeClr val="accent4">
-                    <a:lumMod val="60000"/>
-                    <a:lumOff val="40000"/>
-                  </a:schemeClr>
-                </a:solidFill>
-                <a:prstDash val="solid"/>
-              </a:ln>
-              <a:extLst>
-                <a:ext uri="{909E8E84-426E-40DD-AFC4-6F175D3DCCD1}">
-                  <a14:hiddenFill xmlns:a14="http://schemas.microsoft.com/office/drawing/2010/main">
-                    <a:solidFill>
-                      <a:schemeClr val="accent1"/>
-                    </a:solidFill>
-                  </a14:hiddenFill>
-                </a:ext>
-              </a:extLst>
-            </p:spPr>
-            <p:style>
-              <a:lnRef idx="2">
-                <a:schemeClr val="accent1">
-                  <a:lumMod val="75000"/>
-                </a:schemeClr>
-              </a:lnRef>
-              <a:fillRef idx="1">
-                <a:schemeClr val="accent1"/>
-              </a:fillRef>
-              <a:effectRef idx="0">
-                <a:srgbClr val="FFFFFF"/>
-              </a:effectRef>
-              <a:fontRef idx="minor">
-                <a:schemeClr val="lt1"/>
-              </a:fontRef>
-            </p:style>
-            <p:txBody>
-              <a:bodyPr rtlCol="0" anchor="ctr"/>
-              <a:lstStyle/>
-              <a:p>
-                <a:pPr algn="ctr"/>
-                <a:endParaRPr lang="zh-CN" altLang="en-US"/>
-              </a:p>
-            </p:txBody>
-          </p:sp>
-          <p:sp>
-            <p:nvSpPr>
-              <p:cNvPr id="55" name="矩形 54"/>
-              <p:cNvSpPr/>
-              <p:nvPr/>
-            </p:nvSpPr>
-            <p:spPr>
-              <a:xfrm>
-                <a:off x="5360670" y="1889527"/>
-                <a:ext cx="1453138" cy="263394"/>
-              </a:xfrm>
-              <a:prstGeom prst="rect">
-                <a:avLst/>
-              </a:prstGeom>
-              <a:noFill/>
-              <a:ln>
-                <a:solidFill>
-                  <a:schemeClr val="accent4">
-                    <a:lumMod val="50000"/>
-                  </a:schemeClr>
-                </a:solidFill>
-                <a:prstDash val="solid"/>
-              </a:ln>
-              <a:extLst>
-                <a:ext uri="{909E8E84-426E-40DD-AFC4-6F175D3DCCD1}">
-                  <a14:hiddenFill xmlns:a14="http://schemas.microsoft.com/office/drawing/2010/main">
-                    <a:solidFill>
-                      <a:schemeClr val="accent1"/>
-                    </a:solidFill>
-                  </a14:hiddenFill>
-                </a:ext>
-              </a:extLst>
-            </p:spPr>
-            <p:style>
-              <a:lnRef idx="2">
-                <a:schemeClr val="accent1">
-                  <a:lumMod val="75000"/>
-                </a:schemeClr>
-              </a:lnRef>
-              <a:fillRef idx="1">
-                <a:schemeClr val="accent1"/>
-              </a:fillRef>
-              <a:effectRef idx="0">
-                <a:srgbClr val="FFFFFF"/>
-              </a:effectRef>
-              <a:fontRef idx="minor">
-                <a:schemeClr val="lt1"/>
-              </a:fontRef>
-            </p:style>
-            <p:txBody>
-              <a:bodyPr rtlCol="0" anchor="ctr"/>
-              <a:lstStyle/>
-              <a:p>
-                <a:pPr algn="ctr"/>
-                <a:endParaRPr lang="zh-CN" altLang="en-US" dirty="0"/>
-              </a:p>
-            </p:txBody>
-          </p:sp>
-        </p:grpSp>
-        <p:cxnSp>
-          <p:nvCxnSpPr>
-            <p:cNvPr id="130" name="曲线连接符 129"/>
-            <p:cNvCxnSpPr/>
-            <p:nvPr/>
-          </p:nvCxnSpPr>
-          <p:spPr>
-            <a:xfrm rot="5400000" flipV="1">
-              <a:off x="12760" y="1704"/>
-              <a:ext cx="711" cy="135"/>
-            </a:xfrm>
-            <a:prstGeom prst="curvedConnector3">
-              <a:avLst>
-                <a:gd name="adj1" fmla="val 50070"/>
-              </a:avLst>
-            </a:prstGeom>
-            <a:ln>
-              <a:tailEnd type="arrow"/>
-            </a:ln>
+                </a14:hiddenFill>
+              </a:ext>
+            </a:extLst>
           </p:spPr>
           <p:style>
             <a:lnRef idx="2">
+              <a:schemeClr val="accent1">
+                <a:lumMod val="75000"/>
+              </a:schemeClr>
+            </a:lnRef>
+            <a:fillRef idx="1">
               <a:schemeClr val="accent1"/>
-            </a:lnRef>
-            <a:fillRef idx="0">
-              <a:srgbClr val="FFFFFF"/>
             </a:fillRef>
             <a:effectRef idx="0">
               <a:srgbClr val="FFFFFF"/>
             </a:effectRef>
             <a:fontRef idx="minor">
-              <a:schemeClr val="tx1"/>
+              <a:schemeClr val="lt1"/>
             </a:fontRef>
           </p:style>
-        </p:cxnSp>
-        <p:cxnSp>
-          <p:nvCxnSpPr>
-            <p:cNvPr id="133" name="曲线连接符 132"/>
-            <p:cNvCxnSpPr/>
+          <p:txBody>
+            <a:bodyPr rtlCol="0" anchor="ctr"/>
+            <a:lstStyle/>
+            <a:p>
+              <a:pPr algn="ctr"/>
+              <a:endParaRPr lang="zh-CN" altLang="en-US"/>
+            </a:p>
+          </p:txBody>
+        </p:sp>
+        <p:sp>
+          <p:nvSpPr>
+            <p:cNvPr id="15" name="矩形 14"/>
+            <p:cNvSpPr/>
             <p:nvPr/>
-          </p:nvCxnSpPr>
+          </p:nvSpPr>
           <p:spPr>
-            <a:xfrm rot="5400000" flipV="1">
-              <a:off x="13907" y="1769"/>
-              <a:ext cx="816" cy="231"/>
+            <a:xfrm>
+              <a:off x="5360670" y="1339576"/>
+              <a:ext cx="1453138" cy="263394"/>
             </a:xfrm>
-            <a:prstGeom prst="curvedConnector3">
-              <a:avLst>
-                <a:gd name="adj1" fmla="val 50061"/>
-              </a:avLst>
+            <a:prstGeom prst="rect">
+              <a:avLst/>
             </a:prstGeom>
+            <a:noFill/>
             <a:ln>
-              <a:tailEnd type="arrow"/>
+              <a:solidFill>
+                <a:schemeClr val="accent6">
+                  <a:lumMod val="75000"/>
+                </a:schemeClr>
+              </a:solidFill>
+              <a:prstDash val="solid"/>
             </a:ln>
+            <a:extLst>
+              <a:ext uri="{909E8E84-426E-40DD-AFC4-6F175D3DCCD1}">
+                <a14:hiddenFill xmlns:a14="http://schemas.microsoft.com/office/drawing/2010/main">
+                  <a:solidFill>
+                    <a:schemeClr val="accent1"/>
+                  </a:solidFill>
+                </a14:hiddenFill>
+              </a:ext>
+            </a:extLst>
           </p:spPr>
           <p:style>
             <a:lnRef idx="2">
+              <a:schemeClr val="accent1">
+                <a:lumMod val="75000"/>
+              </a:schemeClr>
+            </a:lnRef>
+            <a:fillRef idx="1">
               <a:schemeClr val="accent1"/>
-            </a:lnRef>
-            <a:fillRef idx="0">
-              <a:srgbClr val="FFFFFF"/>
             </a:fillRef>
             <a:effectRef idx="0">
               <a:srgbClr val="FFFFFF"/>
             </a:effectRef>
             <a:fontRef idx="minor">
-              <a:schemeClr val="tx1"/>
+              <a:schemeClr val="lt1"/>
             </a:fontRef>
           </p:style>
-        </p:cxnSp>
-        <p:cxnSp>
-          <p:nvCxnSpPr>
-            <p:cNvPr id="134" name="曲线连接符 133"/>
-            <p:cNvCxnSpPr/>
+          <p:txBody>
+            <a:bodyPr rtlCol="0" anchor="ctr"/>
+            <a:lstStyle/>
+            <a:p>
+              <a:pPr algn="ctr"/>
+              <a:endParaRPr lang="zh-CN" altLang="en-US"/>
+            </a:p>
+          </p:txBody>
+        </p:sp>
+        <p:sp>
+          <p:nvSpPr>
+            <p:cNvPr id="17" name="矩形 16"/>
+            <p:cNvSpPr/>
             <p:nvPr/>
-          </p:nvCxnSpPr>
+          </p:nvSpPr>
           <p:spPr>
-            <a:xfrm rot="5400000" flipV="1">
-              <a:off x="15185" y="1904"/>
-              <a:ext cx="643" cy="154"/>
+            <a:xfrm>
+              <a:off x="5360670" y="1617569"/>
+              <a:ext cx="1453138" cy="263394"/>
             </a:xfrm>
-            <a:prstGeom prst="curvedConnector3">
-              <a:avLst>
-                <a:gd name="adj1" fmla="val 50000"/>
-              </a:avLst>
+            <a:prstGeom prst="rect">
+              <a:avLst/>
             </a:prstGeom>
+            <a:noFill/>
             <a:ln>
-              <a:tailEnd type="arrow"/>
+              <a:solidFill>
+                <a:srgbClr val="34D399"/>
+              </a:solidFill>
+              <a:prstDash val="solid"/>
             </a:ln>
+            <a:extLst>
+              <a:ext uri="{909E8E84-426E-40DD-AFC4-6F175D3DCCD1}">
+                <a14:hiddenFill xmlns:a14="http://schemas.microsoft.com/office/drawing/2010/main">
+                  <a:solidFill>
+                    <a:schemeClr val="accent1"/>
+                  </a:solidFill>
+                </a14:hiddenFill>
+              </a:ext>
+            </a:extLst>
           </p:spPr>
           <p:style>
             <a:lnRef idx="2">
+              <a:schemeClr val="accent1">
+                <a:lumMod val="75000"/>
+              </a:schemeClr>
+            </a:lnRef>
+            <a:fillRef idx="1">
               <a:schemeClr val="accent1"/>
-            </a:lnRef>
-            <a:fillRef idx="0">
-              <a:srgbClr val="FFFFFF"/>
             </a:fillRef>
             <a:effectRef idx="0">
               <a:srgbClr val="FFFFFF"/>
             </a:effectRef>
             <a:fontRef idx="minor">
-              <a:schemeClr val="tx1"/>
+              <a:schemeClr val="lt1"/>
             </a:fontRef>
           </p:style>
-        </p:cxnSp>
+          <p:txBody>
+            <a:bodyPr rtlCol="0" anchor="ctr"/>
+            <a:lstStyle/>
+            <a:p>
+              <a:pPr algn="ctr"/>
+              <a:endParaRPr lang="zh-CN" altLang="en-US"/>
+            </a:p>
+          </p:txBody>
+        </p:sp>
+        <p:sp>
+          <p:nvSpPr>
+            <p:cNvPr id="19" name="矩形 18"/>
+            <p:cNvSpPr/>
+            <p:nvPr/>
+          </p:nvSpPr>
+          <p:spPr>
+            <a:xfrm>
+              <a:off x="5360670" y="1889527"/>
+              <a:ext cx="1453138" cy="263394"/>
+            </a:xfrm>
+            <a:prstGeom prst="rect">
+              <a:avLst/>
+            </a:prstGeom>
+            <a:noFill/>
+            <a:ln>
+              <a:solidFill>
+                <a:schemeClr val="accent6">
+                  <a:lumMod val="75000"/>
+                </a:schemeClr>
+              </a:solidFill>
+              <a:prstDash val="solid"/>
+            </a:ln>
+            <a:extLst>
+              <a:ext uri="{909E8E84-426E-40DD-AFC4-6F175D3DCCD1}">
+                <a14:hiddenFill xmlns:a14="http://schemas.microsoft.com/office/drawing/2010/main">
+                  <a:solidFill>
+                    <a:schemeClr val="accent1"/>
+                  </a:solidFill>
+                </a14:hiddenFill>
+              </a:ext>
+            </a:extLst>
+          </p:spPr>
+          <p:style>
+            <a:lnRef idx="2">
+              <a:schemeClr val="accent1">
+                <a:lumMod val="75000"/>
+              </a:schemeClr>
+            </a:lnRef>
+            <a:fillRef idx="1">
+              <a:schemeClr val="accent1"/>
+            </a:fillRef>
+            <a:effectRef idx="0">
+              <a:srgbClr val="FFFFFF"/>
+            </a:effectRef>
+            <a:fontRef idx="minor">
+              <a:schemeClr val="lt1"/>
+            </a:fontRef>
+          </p:style>
+          <p:txBody>
+            <a:bodyPr rtlCol="0" anchor="ctr"/>
+            <a:lstStyle/>
+            <a:p>
+              <a:pPr algn="ctr"/>
+              <a:endParaRPr lang="zh-CN" altLang="en-US"/>
+            </a:p>
+          </p:txBody>
+        </p:sp>
       </p:grpSp>
+      <p:grpSp>
+        <p:nvGrpSpPr>
+          <p:cNvPr id="43" name="组合 42"/>
+          <p:cNvGrpSpPr/>
+          <p:nvPr/>
+        </p:nvGrpSpPr>
+        <p:grpSpPr>
+          <a:xfrm rot="0">
+            <a:off x="10259695" y="1972310"/>
+            <a:ext cx="1452880" cy="657225"/>
+            <a:chOff x="5360670" y="1085663"/>
+            <a:chExt cx="1453138" cy="1067258"/>
+          </a:xfrm>
+          <a:scene3d>
+            <a:camera prst="isometricOffAxis2Right"/>
+            <a:lightRig rig="threePt" dir="t"/>
+          </a:scene3d>
+        </p:grpSpPr>
+        <p:sp>
+          <p:nvSpPr>
+            <p:cNvPr id="45" name="矩形 44"/>
+            <p:cNvSpPr/>
+            <p:nvPr/>
+          </p:nvSpPr>
+          <p:spPr>
+            <a:xfrm>
+              <a:off x="5360670" y="1085663"/>
+              <a:ext cx="1453138" cy="263394"/>
+            </a:xfrm>
+            <a:prstGeom prst="rect">
+              <a:avLst/>
+            </a:prstGeom>
+            <a:noFill/>
+            <a:ln>
+              <a:solidFill>
+                <a:schemeClr val="accent4">
+                  <a:lumMod val="60000"/>
+                  <a:lumOff val="40000"/>
+                </a:schemeClr>
+              </a:solidFill>
+              <a:prstDash val="solid"/>
+            </a:ln>
+            <a:extLst>
+              <a:ext uri="{909E8E84-426E-40DD-AFC4-6F175D3DCCD1}">
+                <a14:hiddenFill xmlns:a14="http://schemas.microsoft.com/office/drawing/2010/main">
+                  <a:solidFill>
+                    <a:schemeClr val="accent1"/>
+                  </a:solidFill>
+                </a14:hiddenFill>
+              </a:ext>
+            </a:extLst>
+          </p:spPr>
+          <p:style>
+            <a:lnRef idx="2">
+              <a:schemeClr val="accent1">
+                <a:lumMod val="75000"/>
+              </a:schemeClr>
+            </a:lnRef>
+            <a:fillRef idx="1">
+              <a:schemeClr val="accent1"/>
+            </a:fillRef>
+            <a:effectRef idx="0">
+              <a:srgbClr val="FFFFFF"/>
+            </a:effectRef>
+            <a:fontRef idx="minor">
+              <a:schemeClr val="lt1"/>
+            </a:fontRef>
+          </p:style>
+          <p:txBody>
+            <a:bodyPr rtlCol="0" anchor="ctr"/>
+            <a:lstStyle/>
+            <a:p>
+              <a:pPr algn="ctr"/>
+              <a:endParaRPr lang="zh-CN" altLang="en-US" dirty="0"/>
+            </a:p>
+          </p:txBody>
+        </p:sp>
+        <p:sp>
+          <p:nvSpPr>
+            <p:cNvPr id="47" name="矩形 46"/>
+            <p:cNvSpPr/>
+            <p:nvPr/>
+          </p:nvSpPr>
+          <p:spPr>
+            <a:xfrm>
+              <a:off x="5360670" y="1347825"/>
+              <a:ext cx="1453138" cy="263394"/>
+            </a:xfrm>
+            <a:prstGeom prst="rect">
+              <a:avLst/>
+            </a:prstGeom>
+            <a:noFill/>
+            <a:ln>
+              <a:solidFill>
+                <a:schemeClr val="tx2">
+                  <a:lumMod val="90000"/>
+                  <a:lumOff val="10000"/>
+                </a:schemeClr>
+              </a:solidFill>
+              <a:prstDash val="solid"/>
+            </a:ln>
+            <a:extLst>
+              <a:ext uri="{909E8E84-426E-40DD-AFC4-6F175D3DCCD1}">
+                <a14:hiddenFill xmlns:a14="http://schemas.microsoft.com/office/drawing/2010/main">
+                  <a:solidFill>
+                    <a:schemeClr val="accent1"/>
+                  </a:solidFill>
+                </a14:hiddenFill>
+              </a:ext>
+            </a:extLst>
+          </p:spPr>
+          <p:style>
+            <a:lnRef idx="2">
+              <a:schemeClr val="accent1">
+                <a:lumMod val="75000"/>
+              </a:schemeClr>
+            </a:lnRef>
+            <a:fillRef idx="1">
+              <a:schemeClr val="accent1"/>
+            </a:fillRef>
+            <a:effectRef idx="0">
+              <a:srgbClr val="FFFFFF"/>
+            </a:effectRef>
+            <a:fontRef idx="minor">
+              <a:schemeClr val="lt1"/>
+            </a:fontRef>
+          </p:style>
+          <p:txBody>
+            <a:bodyPr rtlCol="0" anchor="ctr"/>
+            <a:lstStyle/>
+            <a:p>
+              <a:pPr algn="ctr"/>
+              <a:endParaRPr lang="zh-CN" altLang="en-US"/>
+            </a:p>
+          </p:txBody>
+        </p:sp>
+        <p:sp>
+          <p:nvSpPr>
+            <p:cNvPr id="49" name="矩形 48"/>
+            <p:cNvSpPr/>
+            <p:nvPr/>
+          </p:nvSpPr>
+          <p:spPr>
+            <a:xfrm>
+              <a:off x="5360670" y="1617569"/>
+              <a:ext cx="1453138" cy="263394"/>
+            </a:xfrm>
+            <a:prstGeom prst="rect">
+              <a:avLst/>
+            </a:prstGeom>
+            <a:noFill/>
+            <a:ln>
+              <a:solidFill>
+                <a:schemeClr val="accent4">
+                  <a:lumMod val="60000"/>
+                  <a:lumOff val="40000"/>
+                </a:schemeClr>
+              </a:solidFill>
+              <a:prstDash val="solid"/>
+            </a:ln>
+            <a:extLst>
+              <a:ext uri="{909E8E84-426E-40DD-AFC4-6F175D3DCCD1}">
+                <a14:hiddenFill xmlns:a14="http://schemas.microsoft.com/office/drawing/2010/main">
+                  <a:solidFill>
+                    <a:schemeClr val="accent1"/>
+                  </a:solidFill>
+                </a14:hiddenFill>
+              </a:ext>
+            </a:extLst>
+          </p:spPr>
+          <p:style>
+            <a:lnRef idx="2">
+              <a:schemeClr val="accent1">
+                <a:lumMod val="75000"/>
+              </a:schemeClr>
+            </a:lnRef>
+            <a:fillRef idx="1">
+              <a:schemeClr val="accent1"/>
+            </a:fillRef>
+            <a:effectRef idx="0">
+              <a:srgbClr val="FFFFFF"/>
+            </a:effectRef>
+            <a:fontRef idx="minor">
+              <a:schemeClr val="lt1"/>
+            </a:fontRef>
+          </p:style>
+          <p:txBody>
+            <a:bodyPr rtlCol="0" anchor="ctr"/>
+            <a:lstStyle/>
+            <a:p>
+              <a:pPr algn="ctr"/>
+              <a:endParaRPr lang="zh-CN" altLang="en-US"/>
+            </a:p>
+          </p:txBody>
+        </p:sp>
+        <p:sp>
+          <p:nvSpPr>
+            <p:cNvPr id="50" name="矩形 49"/>
+            <p:cNvSpPr/>
+            <p:nvPr/>
+          </p:nvSpPr>
+          <p:spPr>
+            <a:xfrm>
+              <a:off x="5360670" y="1889527"/>
+              <a:ext cx="1453138" cy="263394"/>
+            </a:xfrm>
+            <a:prstGeom prst="rect">
+              <a:avLst/>
+            </a:prstGeom>
+            <a:noFill/>
+            <a:ln>
+              <a:solidFill>
+                <a:schemeClr val="accent4">
+                  <a:lumMod val="50000"/>
+                </a:schemeClr>
+              </a:solidFill>
+              <a:prstDash val="solid"/>
+            </a:ln>
+            <a:extLst>
+              <a:ext uri="{909E8E84-426E-40DD-AFC4-6F175D3DCCD1}">
+                <a14:hiddenFill xmlns:a14="http://schemas.microsoft.com/office/drawing/2010/main">
+                  <a:solidFill>
+                    <a:schemeClr val="accent1"/>
+                  </a:solidFill>
+                </a14:hiddenFill>
+              </a:ext>
+            </a:extLst>
+          </p:spPr>
+          <p:style>
+            <a:lnRef idx="2">
+              <a:schemeClr val="accent1">
+                <a:lumMod val="75000"/>
+              </a:schemeClr>
+            </a:lnRef>
+            <a:fillRef idx="1">
+              <a:schemeClr val="accent1"/>
+            </a:fillRef>
+            <a:effectRef idx="0">
+              <a:srgbClr val="FFFFFF"/>
+            </a:effectRef>
+            <a:fontRef idx="minor">
+              <a:schemeClr val="lt1"/>
+            </a:fontRef>
+          </p:style>
+          <p:txBody>
+            <a:bodyPr rtlCol="0" anchor="ctr"/>
+            <a:lstStyle/>
+            <a:p>
+              <a:pPr algn="ctr"/>
+              <a:endParaRPr lang="zh-CN" altLang="en-US" dirty="0"/>
+            </a:p>
+          </p:txBody>
+        </p:sp>
+      </p:grpSp>
+      <p:grpSp>
+        <p:nvGrpSpPr>
+          <p:cNvPr id="24" name="组合 23"/>
+          <p:cNvGrpSpPr/>
+          <p:nvPr/>
+        </p:nvGrpSpPr>
+        <p:grpSpPr>
+          <a:xfrm rot="0">
+            <a:off x="11038205" y="2059940"/>
+            <a:ext cx="1452880" cy="657225"/>
+            <a:chOff x="5360670" y="1085663"/>
+            <a:chExt cx="1453138" cy="1067258"/>
+          </a:xfrm>
+          <a:scene3d>
+            <a:camera prst="isometricOffAxis2Right"/>
+            <a:lightRig rig="threePt" dir="t"/>
+          </a:scene3d>
+        </p:grpSpPr>
+        <p:sp>
+          <p:nvSpPr>
+            <p:cNvPr id="25" name="矩形 24"/>
+            <p:cNvSpPr/>
+            <p:nvPr/>
+          </p:nvSpPr>
+          <p:spPr>
+            <a:xfrm>
+              <a:off x="5360670" y="1085663"/>
+              <a:ext cx="1453138" cy="263394"/>
+            </a:xfrm>
+            <a:prstGeom prst="rect">
+              <a:avLst/>
+            </a:prstGeom>
+            <a:noFill/>
+            <a:ln>
+              <a:solidFill>
+                <a:srgbClr val="34D399"/>
+              </a:solidFill>
+              <a:prstDash val="solid"/>
+            </a:ln>
+            <a:extLst>
+              <a:ext uri="{909E8E84-426E-40DD-AFC4-6F175D3DCCD1}">
+                <a14:hiddenFill xmlns:a14="http://schemas.microsoft.com/office/drawing/2010/main">
+                  <a:solidFill>
+                    <a:schemeClr val="accent1"/>
+                  </a:solidFill>
+                </a14:hiddenFill>
+              </a:ext>
+            </a:extLst>
+          </p:spPr>
+          <p:style>
+            <a:lnRef idx="2">
+              <a:schemeClr val="accent1">
+                <a:lumMod val="75000"/>
+              </a:schemeClr>
+            </a:lnRef>
+            <a:fillRef idx="1">
+              <a:schemeClr val="accent1"/>
+            </a:fillRef>
+            <a:effectRef idx="0">
+              <a:srgbClr val="FFFFFF"/>
+            </a:effectRef>
+            <a:fontRef idx="minor">
+              <a:schemeClr val="lt1"/>
+            </a:fontRef>
+          </p:style>
+          <p:txBody>
+            <a:bodyPr rtlCol="0" anchor="ctr"/>
+            <a:lstStyle/>
+            <a:p>
+              <a:pPr algn="ctr"/>
+              <a:endParaRPr lang="zh-CN" altLang="en-US"/>
+            </a:p>
+          </p:txBody>
+        </p:sp>
+        <p:sp>
+          <p:nvSpPr>
+            <p:cNvPr id="44" name="矩形 43"/>
+            <p:cNvSpPr/>
+            <p:nvPr/>
+          </p:nvSpPr>
+          <p:spPr>
+            <a:xfrm>
+              <a:off x="5360670" y="1347825"/>
+              <a:ext cx="1453138" cy="263394"/>
+            </a:xfrm>
+            <a:prstGeom prst="rect">
+              <a:avLst/>
+            </a:prstGeom>
+            <a:noFill/>
+            <a:ln>
+              <a:solidFill>
+                <a:schemeClr val="accent6"/>
+              </a:solidFill>
+              <a:prstDash val="solid"/>
+            </a:ln>
+            <a:extLst>
+              <a:ext uri="{909E8E84-426E-40DD-AFC4-6F175D3DCCD1}">
+                <a14:hiddenFill xmlns:a14="http://schemas.microsoft.com/office/drawing/2010/main">
+                  <a:solidFill>
+                    <a:schemeClr val="accent1"/>
+                  </a:solidFill>
+                </a14:hiddenFill>
+              </a:ext>
+            </a:extLst>
+          </p:spPr>
+          <p:style>
+            <a:lnRef idx="2">
+              <a:schemeClr val="accent1">
+                <a:lumMod val="75000"/>
+              </a:schemeClr>
+            </a:lnRef>
+            <a:fillRef idx="1">
+              <a:schemeClr val="accent1"/>
+            </a:fillRef>
+            <a:effectRef idx="0">
+              <a:srgbClr val="FFFFFF"/>
+            </a:effectRef>
+            <a:fontRef idx="minor">
+              <a:schemeClr val="lt1"/>
+            </a:fontRef>
+          </p:style>
+          <p:txBody>
+            <a:bodyPr rtlCol="0" anchor="ctr"/>
+            <a:lstStyle/>
+            <a:p>
+              <a:pPr algn="ctr"/>
+              <a:endParaRPr lang="zh-CN" altLang="en-US"/>
+            </a:p>
+          </p:txBody>
+        </p:sp>
+        <p:sp>
+          <p:nvSpPr>
+            <p:cNvPr id="46" name="矩形 45"/>
+            <p:cNvSpPr/>
+            <p:nvPr/>
+          </p:nvSpPr>
+          <p:spPr>
+            <a:xfrm>
+              <a:off x="5360670" y="1617569"/>
+              <a:ext cx="1453138" cy="263394"/>
+            </a:xfrm>
+            <a:prstGeom prst="rect">
+              <a:avLst/>
+            </a:prstGeom>
+            <a:noFill/>
+            <a:ln>
+              <a:solidFill>
+                <a:srgbClr val="34D399"/>
+              </a:solidFill>
+              <a:prstDash val="solid"/>
+            </a:ln>
+            <a:extLst>
+              <a:ext uri="{909E8E84-426E-40DD-AFC4-6F175D3DCCD1}">
+                <a14:hiddenFill xmlns:a14="http://schemas.microsoft.com/office/drawing/2010/main">
+                  <a:solidFill>
+                    <a:schemeClr val="accent1"/>
+                  </a:solidFill>
+                </a14:hiddenFill>
+              </a:ext>
+            </a:extLst>
+          </p:spPr>
+          <p:style>
+            <a:lnRef idx="2">
+              <a:schemeClr val="accent1">
+                <a:lumMod val="75000"/>
+              </a:schemeClr>
+            </a:lnRef>
+            <a:fillRef idx="1">
+              <a:schemeClr val="accent1"/>
+            </a:fillRef>
+            <a:effectRef idx="0">
+              <a:srgbClr val="FFFFFF"/>
+            </a:effectRef>
+            <a:fontRef idx="minor">
+              <a:schemeClr val="lt1"/>
+            </a:fontRef>
+          </p:style>
+          <p:txBody>
+            <a:bodyPr rtlCol="0" anchor="ctr"/>
+            <a:lstStyle/>
+            <a:p>
+              <a:pPr algn="ctr"/>
+              <a:endParaRPr lang="zh-CN" altLang="en-US"/>
+            </a:p>
+          </p:txBody>
+        </p:sp>
+        <p:sp>
+          <p:nvSpPr>
+            <p:cNvPr id="48" name="矩形 47"/>
+            <p:cNvSpPr/>
+            <p:nvPr/>
+          </p:nvSpPr>
+          <p:spPr>
+            <a:xfrm>
+              <a:off x="5360670" y="1889527"/>
+              <a:ext cx="1453138" cy="263394"/>
+            </a:xfrm>
+            <a:prstGeom prst="rect">
+              <a:avLst/>
+            </a:prstGeom>
+            <a:noFill/>
+            <a:ln>
+              <a:solidFill>
+                <a:schemeClr val="accent6"/>
+              </a:solidFill>
+              <a:prstDash val="solid"/>
+            </a:ln>
+            <a:extLst>
+              <a:ext uri="{909E8E84-426E-40DD-AFC4-6F175D3DCCD1}">
+                <a14:hiddenFill xmlns:a14="http://schemas.microsoft.com/office/drawing/2010/main">
+                  <a:solidFill>
+                    <a:schemeClr val="accent1"/>
+                  </a:solidFill>
+                </a14:hiddenFill>
+              </a:ext>
+            </a:extLst>
+          </p:spPr>
+          <p:style>
+            <a:lnRef idx="2">
+              <a:schemeClr val="accent1">
+                <a:lumMod val="75000"/>
+              </a:schemeClr>
+            </a:lnRef>
+            <a:fillRef idx="1">
+              <a:schemeClr val="accent1"/>
+            </a:fillRef>
+            <a:effectRef idx="0">
+              <a:srgbClr val="FFFFFF"/>
+            </a:effectRef>
+            <a:fontRef idx="minor">
+              <a:schemeClr val="lt1"/>
+            </a:fontRef>
+          </p:style>
+          <p:txBody>
+            <a:bodyPr rtlCol="0" anchor="ctr"/>
+            <a:lstStyle/>
+            <a:p>
+              <a:pPr algn="ctr"/>
+              <a:endParaRPr lang="zh-CN" altLang="en-US"/>
+            </a:p>
+          </p:txBody>
+        </p:sp>
+      </p:grpSp>
+      <p:grpSp>
+        <p:nvGrpSpPr>
+          <p:cNvPr id="51" name="组合 50"/>
+          <p:cNvGrpSpPr/>
+          <p:nvPr/>
+        </p:nvGrpSpPr>
+        <p:grpSpPr>
+          <a:xfrm rot="0">
+            <a:off x="11783695" y="2087245"/>
+            <a:ext cx="1452880" cy="657225"/>
+            <a:chOff x="5360670" y="1085663"/>
+            <a:chExt cx="1453138" cy="1067258"/>
+          </a:xfrm>
+          <a:scene3d>
+            <a:camera prst="isometricOffAxis2Right"/>
+            <a:lightRig rig="threePt" dir="t"/>
+          </a:scene3d>
+        </p:grpSpPr>
+        <p:sp>
+          <p:nvSpPr>
+            <p:cNvPr id="52" name="矩形 51"/>
+            <p:cNvSpPr/>
+            <p:nvPr/>
+          </p:nvSpPr>
+          <p:spPr>
+            <a:xfrm>
+              <a:off x="5360670" y="1085663"/>
+              <a:ext cx="1453138" cy="263394"/>
+            </a:xfrm>
+            <a:prstGeom prst="rect">
+              <a:avLst/>
+            </a:prstGeom>
+            <a:noFill/>
+            <a:ln>
+              <a:solidFill>
+                <a:schemeClr val="accent4">
+                  <a:lumMod val="60000"/>
+                  <a:lumOff val="40000"/>
+                </a:schemeClr>
+              </a:solidFill>
+              <a:prstDash val="solid"/>
+            </a:ln>
+            <a:extLst>
+              <a:ext uri="{909E8E84-426E-40DD-AFC4-6F175D3DCCD1}">
+                <a14:hiddenFill xmlns:a14="http://schemas.microsoft.com/office/drawing/2010/main">
+                  <a:solidFill>
+                    <a:schemeClr val="accent1"/>
+                  </a:solidFill>
+                </a14:hiddenFill>
+              </a:ext>
+            </a:extLst>
+          </p:spPr>
+          <p:style>
+            <a:lnRef idx="2">
+              <a:schemeClr val="accent1">
+                <a:lumMod val="75000"/>
+              </a:schemeClr>
+            </a:lnRef>
+            <a:fillRef idx="1">
+              <a:schemeClr val="accent1"/>
+            </a:fillRef>
+            <a:effectRef idx="0">
+              <a:srgbClr val="FFFFFF"/>
+            </a:effectRef>
+            <a:fontRef idx="minor">
+              <a:schemeClr val="lt1"/>
+            </a:fontRef>
+          </p:style>
+          <p:txBody>
+            <a:bodyPr rtlCol="0" anchor="ctr"/>
+            <a:lstStyle/>
+            <a:p>
+              <a:pPr algn="ctr"/>
+              <a:endParaRPr lang="zh-CN" altLang="en-US" dirty="0"/>
+            </a:p>
+          </p:txBody>
+        </p:sp>
+        <p:sp>
+          <p:nvSpPr>
+            <p:cNvPr id="53" name="矩形 52"/>
+            <p:cNvSpPr/>
+            <p:nvPr/>
+          </p:nvSpPr>
+          <p:spPr>
+            <a:xfrm>
+              <a:off x="5360670" y="1347825"/>
+              <a:ext cx="1453138" cy="263394"/>
+            </a:xfrm>
+            <a:prstGeom prst="rect">
+              <a:avLst/>
+            </a:prstGeom>
+            <a:noFill/>
+            <a:ln>
+              <a:solidFill>
+                <a:schemeClr val="accent4">
+                  <a:lumMod val="50000"/>
+                </a:schemeClr>
+              </a:solidFill>
+              <a:prstDash val="solid"/>
+            </a:ln>
+            <a:extLst>
+              <a:ext uri="{909E8E84-426E-40DD-AFC4-6F175D3DCCD1}">
+                <a14:hiddenFill xmlns:a14="http://schemas.microsoft.com/office/drawing/2010/main">
+                  <a:solidFill>
+                    <a:schemeClr val="accent1"/>
+                  </a:solidFill>
+                </a14:hiddenFill>
+              </a:ext>
+            </a:extLst>
+          </p:spPr>
+          <p:style>
+            <a:lnRef idx="2">
+              <a:schemeClr val="accent1">
+                <a:lumMod val="75000"/>
+              </a:schemeClr>
+            </a:lnRef>
+            <a:fillRef idx="1">
+              <a:schemeClr val="accent1"/>
+            </a:fillRef>
+            <a:effectRef idx="0">
+              <a:srgbClr val="FFFFFF"/>
+            </a:effectRef>
+            <a:fontRef idx="minor">
+              <a:schemeClr val="lt1"/>
+            </a:fontRef>
+          </p:style>
+          <p:txBody>
+            <a:bodyPr rtlCol="0" anchor="ctr"/>
+            <a:lstStyle/>
+            <a:p>
+              <a:pPr algn="ctr"/>
+              <a:endParaRPr lang="zh-CN" altLang="en-US"/>
+            </a:p>
+          </p:txBody>
+        </p:sp>
+        <p:sp>
+          <p:nvSpPr>
+            <p:cNvPr id="54" name="矩形 53"/>
+            <p:cNvSpPr/>
+            <p:nvPr/>
+          </p:nvSpPr>
+          <p:spPr>
+            <a:xfrm>
+              <a:off x="5360670" y="1617569"/>
+              <a:ext cx="1453138" cy="263394"/>
+            </a:xfrm>
+            <a:prstGeom prst="rect">
+              <a:avLst/>
+            </a:prstGeom>
+            <a:noFill/>
+            <a:ln>
+              <a:solidFill>
+                <a:schemeClr val="accent4">
+                  <a:lumMod val="60000"/>
+                  <a:lumOff val="40000"/>
+                </a:schemeClr>
+              </a:solidFill>
+              <a:prstDash val="solid"/>
+            </a:ln>
+            <a:extLst>
+              <a:ext uri="{909E8E84-426E-40DD-AFC4-6F175D3DCCD1}">
+                <a14:hiddenFill xmlns:a14="http://schemas.microsoft.com/office/drawing/2010/main">
+                  <a:solidFill>
+                    <a:schemeClr val="accent1"/>
+                  </a:solidFill>
+                </a14:hiddenFill>
+              </a:ext>
+            </a:extLst>
+          </p:spPr>
+          <p:style>
+            <a:lnRef idx="2">
+              <a:schemeClr val="accent1">
+                <a:lumMod val="75000"/>
+              </a:schemeClr>
+            </a:lnRef>
+            <a:fillRef idx="1">
+              <a:schemeClr val="accent1"/>
+            </a:fillRef>
+            <a:effectRef idx="0">
+              <a:srgbClr val="FFFFFF"/>
+            </a:effectRef>
+            <a:fontRef idx="minor">
+              <a:schemeClr val="lt1"/>
+            </a:fontRef>
+          </p:style>
+          <p:txBody>
+            <a:bodyPr rtlCol="0" anchor="ctr"/>
+            <a:lstStyle/>
+            <a:p>
+              <a:pPr algn="ctr"/>
+              <a:endParaRPr lang="zh-CN" altLang="en-US"/>
+            </a:p>
+          </p:txBody>
+        </p:sp>
+        <p:sp>
+          <p:nvSpPr>
+            <p:cNvPr id="55" name="矩形 54"/>
+            <p:cNvSpPr/>
+            <p:nvPr/>
+          </p:nvSpPr>
+          <p:spPr>
+            <a:xfrm>
+              <a:off x="5360670" y="1889527"/>
+              <a:ext cx="1453138" cy="263394"/>
+            </a:xfrm>
+            <a:prstGeom prst="rect">
+              <a:avLst/>
+            </a:prstGeom>
+            <a:noFill/>
+            <a:ln>
+              <a:solidFill>
+                <a:schemeClr val="accent4">
+                  <a:lumMod val="50000"/>
+                </a:schemeClr>
+              </a:solidFill>
+              <a:prstDash val="solid"/>
+            </a:ln>
+            <a:extLst>
+              <a:ext uri="{909E8E84-426E-40DD-AFC4-6F175D3DCCD1}">
+                <a14:hiddenFill xmlns:a14="http://schemas.microsoft.com/office/drawing/2010/main">
+                  <a:solidFill>
+                    <a:schemeClr val="accent1"/>
+                  </a:solidFill>
+                </a14:hiddenFill>
+              </a:ext>
+            </a:extLst>
+          </p:spPr>
+          <p:style>
+            <a:lnRef idx="2">
+              <a:schemeClr val="accent1">
+                <a:lumMod val="75000"/>
+              </a:schemeClr>
+            </a:lnRef>
+            <a:fillRef idx="1">
+              <a:schemeClr val="accent1"/>
+            </a:fillRef>
+            <a:effectRef idx="0">
+              <a:srgbClr val="FFFFFF"/>
+            </a:effectRef>
+            <a:fontRef idx="minor">
+              <a:schemeClr val="lt1"/>
+            </a:fontRef>
+          </p:style>
+          <p:txBody>
+            <a:bodyPr rtlCol="0" anchor="ctr"/>
+            <a:lstStyle/>
+            <a:p>
+              <a:pPr algn="ctr"/>
+              <a:endParaRPr lang="zh-CN" altLang="en-US" dirty="0"/>
+            </a:p>
+          </p:txBody>
+        </p:sp>
+      </p:grpSp>
+      <p:cxnSp>
+        <p:nvCxnSpPr>
+          <p:cNvPr id="130" name="曲线连接符 129"/>
+          <p:cNvCxnSpPr/>
+          <p:nvPr/>
+        </p:nvCxnSpPr>
+        <p:spPr>
+          <a:xfrm rot="5400000" flipV="1">
+            <a:off x="10392410" y="2000885"/>
+            <a:ext cx="451485" cy="85725"/>
+          </a:xfrm>
+          <a:prstGeom prst="curvedConnector3">
+            <a:avLst>
+              <a:gd name="adj1" fmla="val 50070"/>
+            </a:avLst>
+          </a:prstGeom>
+          <a:ln>
+            <a:tailEnd type="arrow"/>
+          </a:ln>
+        </p:spPr>
+        <p:style>
+          <a:lnRef idx="2">
+            <a:schemeClr val="accent1"/>
+          </a:lnRef>
+          <a:fillRef idx="0">
+            <a:srgbClr val="FFFFFF"/>
+          </a:fillRef>
+          <a:effectRef idx="0">
+            <a:srgbClr val="FFFFFF"/>
+          </a:effectRef>
+          <a:fontRef idx="minor">
+            <a:schemeClr val="tx1"/>
+          </a:fontRef>
+        </p:style>
+      </p:cxnSp>
+      <p:cxnSp>
+        <p:nvCxnSpPr>
+          <p:cNvPr id="133" name="曲线连接符 132"/>
+          <p:cNvCxnSpPr/>
+          <p:nvPr/>
+        </p:nvCxnSpPr>
+        <p:spPr>
+          <a:xfrm rot="5400000" flipV="1">
+            <a:off x="11120755" y="2042160"/>
+            <a:ext cx="518160" cy="146685"/>
+          </a:xfrm>
+          <a:prstGeom prst="curvedConnector3">
+            <a:avLst>
+              <a:gd name="adj1" fmla="val 50061"/>
+            </a:avLst>
+          </a:prstGeom>
+          <a:ln>
+            <a:tailEnd type="arrow"/>
+          </a:ln>
+        </p:spPr>
+        <p:style>
+          <a:lnRef idx="2">
+            <a:schemeClr val="accent1"/>
+          </a:lnRef>
+          <a:fillRef idx="0">
+            <a:srgbClr val="FFFFFF"/>
+          </a:fillRef>
+          <a:effectRef idx="0">
+            <a:srgbClr val="FFFFFF"/>
+          </a:effectRef>
+          <a:fontRef idx="minor">
+            <a:schemeClr val="tx1"/>
+          </a:fontRef>
+        </p:style>
+      </p:cxnSp>
+      <p:cxnSp>
+        <p:nvCxnSpPr>
+          <p:cNvPr id="134" name="曲线连接符 133"/>
+          <p:cNvCxnSpPr/>
+          <p:nvPr/>
+        </p:nvCxnSpPr>
+        <p:spPr>
+          <a:xfrm rot="5400000" flipV="1">
+            <a:off x="11932285" y="2127885"/>
+            <a:ext cx="408305" cy="97790"/>
+          </a:xfrm>
+          <a:prstGeom prst="curvedConnector3">
+            <a:avLst>
+              <a:gd name="adj1" fmla="val 50000"/>
+            </a:avLst>
+          </a:prstGeom>
+          <a:ln>
+            <a:tailEnd type="arrow"/>
+          </a:ln>
+        </p:spPr>
+        <p:style>
+          <a:lnRef idx="2">
+            <a:schemeClr val="accent1"/>
+          </a:lnRef>
+          <a:fillRef idx="0">
+            <a:srgbClr val="FFFFFF"/>
+          </a:fillRef>
+          <a:effectRef idx="0">
+            <a:srgbClr val="FFFFFF"/>
+          </a:effectRef>
+          <a:fontRef idx="minor">
+            <a:schemeClr val="tx1"/>
+          </a:fontRef>
+        </p:style>
+      </p:cxnSp>
       <p:sp>
         <p:nvSpPr>
           <p:cNvPr id="8" name="左大括号 7"/>
@@ -21428,7 +21423,7 @@
         </p:nvSpPr>
         <p:spPr>
           <a:xfrm>
-            <a:off x="12419330" y="6185217"/>
+            <a:off x="12419330" y="6126956"/>
             <a:ext cx="3217557" cy="369332"/>
           </a:xfrm>
           <a:prstGeom prst="rect">
